--- a/Day07-FastAPI-Advanced-Security-and-MongoDB/Day07_Deck_FastAPI_Advanced_Security_and_MongoDB.pptx
+++ b/Day07-FastAPI-Advanced-Security-and-MongoDB/Day07_Deck_FastAPI_Advanced_Security_and_MongoDB.pptx
@@ -5808,13 +5808,13 @@
           <a:noFill/>
         </p:spPr>
         <p:txBody>
-          <a:bodyPr wrap="square" lIns="0" rIns="0" tIns="0" bIns="0" anchor="t">
-            <a:spAutoFit/>
-          </a:bodyPr>
-          <a:lstStyle/>
-          <a:p>
-            <a:r>
-              <a:rPr sz="962" b="0" i="0">
+          <a:bodyPr wrap="none" lIns="0" rIns="0" tIns="0" bIns="0" anchor="t">
+            <a:spAutoFit/>
+          </a:bodyPr>
+          <a:lstStyle/>
+          <a:p>
+            <a:r>
+              <a:rPr sz="846" b="0" i="0">
                 <a:solidFill>
                   <a:srgbClr val="EAF7F5"/>
                 </a:solidFill>
@@ -5825,7 +5825,7 @@
           </a:p>
           <a:p>
             <a:r>
-              <a:rPr sz="962" b="0" i="0">
+              <a:rPr sz="846" b="0" i="0">
                 <a:solidFill>
                   <a:srgbClr val="EAF7F5"/>
                 </a:solidFill>
@@ -5836,7 +5836,7 @@
           </a:p>
           <a:p>
             <a:r>
-              <a:rPr sz="962" b="0" i="0">
+              <a:rPr sz="846" b="0" i="0">
                 <a:solidFill>
                   <a:srgbClr val="EAF7F5"/>
                 </a:solidFill>
@@ -5847,7 +5847,7 @@
           </a:p>
           <a:p>
             <a:r>
-              <a:rPr sz="962" b="0" i="0">
+              <a:rPr sz="846" b="0" i="0">
                 <a:solidFill>
                   <a:srgbClr val="EAF7F5"/>
                 </a:solidFill>
@@ -5858,7 +5858,7 @@
           </a:p>
           <a:p>
             <a:r>
-              <a:rPr sz="962" b="0" i="0">
+              <a:rPr sz="846" b="0" i="0">
                 <a:solidFill>
                   <a:srgbClr val="EAF7F5"/>
                 </a:solidFill>
@@ -5869,7 +5869,7 @@
           </a:p>
           <a:p>
             <a:r>
-              <a:rPr sz="962" b="0" i="0">
+              <a:rPr sz="846" b="0" i="0">
                 <a:solidFill>
                   <a:srgbClr val="EAF7F5"/>
                 </a:solidFill>
@@ -5880,7 +5880,7 @@
           </a:p>
           <a:p>
             <a:r>
-              <a:rPr sz="962" b="0" i="0">
+              <a:rPr sz="846" b="0" i="0">
                 <a:solidFill>
                   <a:srgbClr val="EAF7F5"/>
                 </a:solidFill>
@@ -5891,7 +5891,7 @@
           </a:p>
           <a:p>
             <a:r>
-              <a:rPr sz="962" b="0" i="0">
+              <a:rPr sz="846" b="0" i="0">
                 <a:solidFill>
                   <a:srgbClr val="EAF7F5"/>
                 </a:solidFill>
@@ -5902,7 +5902,7 @@
           </a:p>
           <a:p>
             <a:r>
-              <a:rPr sz="962" b="0" i="0">
+              <a:rPr sz="846" b="0" i="0">
                 <a:solidFill>
                   <a:srgbClr val="EAF7F5"/>
                 </a:solidFill>
@@ -5913,7 +5913,7 @@
           </a:p>
           <a:p>
             <a:r>
-              <a:rPr sz="962" b="0" i="0">
+              <a:rPr sz="846" b="0" i="0">
                 <a:solidFill>
                   <a:srgbClr val="EAF7F5"/>
                 </a:solidFill>
@@ -5924,7 +5924,7 @@
           </a:p>
           <a:p>
             <a:r>
-              <a:rPr sz="962" b="0" i="0">
+              <a:rPr sz="846" b="0" i="0">
                 <a:solidFill>
                   <a:srgbClr val="EAF7F5"/>
                 </a:solidFill>
@@ -5935,7 +5935,7 @@
           </a:p>
           <a:p>
             <a:r>
-              <a:rPr sz="962" b="0" i="0">
+              <a:rPr sz="846" b="0" i="0">
                 <a:solidFill>
                   <a:srgbClr val="EAF7F5"/>
                 </a:solidFill>
@@ -5946,7 +5946,7 @@
           </a:p>
           <a:p>
             <a:r>
-              <a:rPr sz="962" b="0" i="0">
+              <a:rPr sz="846" b="0" i="0">
                 <a:solidFill>
                   <a:srgbClr val="EAF7F5"/>
                 </a:solidFill>
@@ -5957,7 +5957,7 @@
           </a:p>
           <a:p>
             <a:r>
-              <a:rPr sz="962" b="0" i="0">
+              <a:rPr sz="846" b="0" i="0">
                 <a:solidFill>
                   <a:srgbClr val="EAF7F5"/>
                 </a:solidFill>
@@ -9599,13 +9599,13 @@
           <a:noFill/>
         </p:spPr>
         <p:txBody>
-          <a:bodyPr wrap="square" lIns="0" rIns="0" tIns="0" bIns="0" anchor="t">
-            <a:spAutoFit/>
-          </a:bodyPr>
-          <a:lstStyle/>
-          <a:p>
-            <a:r>
-              <a:rPr sz="1108" b="0" i="0">
+          <a:bodyPr wrap="none" lIns="0" rIns="0" tIns="0" bIns="0" anchor="t">
+            <a:spAutoFit/>
+          </a:bodyPr>
+          <a:lstStyle/>
+          <a:p>
+            <a:r>
+              <a:rPr sz="975" b="0" i="0">
                 <a:solidFill>
                   <a:srgbClr val="EAF7F5"/>
                 </a:solidFill>
@@ -9616,7 +9616,7 @@
           </a:p>
           <a:p>
             <a:r>
-              <a:rPr sz="1108" b="0" i="0">
+              <a:rPr sz="975" b="0" i="0">
                 <a:solidFill>
                   <a:srgbClr val="EAF7F5"/>
                 </a:solidFill>
@@ -9627,7 +9627,7 @@
           </a:p>
           <a:p>
             <a:r>
-              <a:rPr sz="1108" b="0" i="0">
+              <a:rPr sz="975" b="0" i="0">
                 <a:solidFill>
                   <a:srgbClr val="EAF7F5"/>
                 </a:solidFill>
@@ -9638,7 +9638,7 @@
           </a:p>
           <a:p>
             <a:r>
-              <a:rPr sz="1108" b="0" i="0">
+              <a:rPr sz="975" b="0" i="0">
                 <a:solidFill>
                   <a:srgbClr val="EAF7F5"/>
                 </a:solidFill>
@@ -9649,7 +9649,7 @@
           </a:p>
           <a:p>
             <a:r>
-              <a:rPr sz="1108" b="0" i="0">
+              <a:rPr sz="975" b="0" i="0">
                 <a:solidFill>
                   <a:srgbClr val="EAF7F5"/>
                 </a:solidFill>
@@ -9660,7 +9660,7 @@
           </a:p>
           <a:p>
             <a:r>
-              <a:rPr sz="1108" b="0" i="0">
+              <a:rPr sz="975" b="0" i="0">
                 <a:solidFill>
                   <a:srgbClr val="EAF7F5"/>
                 </a:solidFill>
@@ -9671,7 +9671,7 @@
           </a:p>
           <a:p>
             <a:r>
-              <a:rPr sz="1108" b="0" i="0">
+              <a:rPr sz="975" b="0" i="0">
                 <a:solidFill>
                   <a:srgbClr val="EAF7F5"/>
                 </a:solidFill>
@@ -9682,7 +9682,7 @@
           </a:p>
           <a:p>
             <a:r>
-              <a:rPr sz="1108" b="0" i="0">
+              <a:rPr sz="975" b="0" i="0">
                 <a:solidFill>
                   <a:srgbClr val="EAF7F5"/>
                 </a:solidFill>
@@ -9693,7 +9693,7 @@
           </a:p>
           <a:p>
             <a:r>
-              <a:rPr sz="1108" b="0" i="0">
+              <a:rPr sz="975" b="0" i="0">
                 <a:solidFill>
                   <a:srgbClr val="EAF7F5"/>
                 </a:solidFill>
@@ -9704,7 +9704,7 @@
           </a:p>
           <a:p>
             <a:r>
-              <a:rPr sz="1108" b="0" i="0">
+              <a:rPr sz="975" b="0" i="0">
                 <a:solidFill>
                   <a:srgbClr val="EAF7F5"/>
                 </a:solidFill>
@@ -11953,13 +11953,13 @@
           <a:noFill/>
         </p:spPr>
         <p:txBody>
-          <a:bodyPr wrap="square" lIns="0" rIns="0" tIns="0" bIns="0" anchor="t">
-            <a:spAutoFit/>
-          </a:bodyPr>
-          <a:lstStyle/>
-          <a:p>
-            <a:r>
-              <a:rPr sz="910" b="0" i="0">
+          <a:bodyPr wrap="none" lIns="0" rIns="0" tIns="0" bIns="0" anchor="t">
+            <a:spAutoFit/>
+          </a:bodyPr>
+          <a:lstStyle/>
+          <a:p>
+            <a:r>
+              <a:rPr sz="801" b="0" i="0">
                 <a:solidFill>
                   <a:srgbClr val="EAF7F5"/>
                 </a:solidFill>
@@ -11970,7 +11970,7 @@
           </a:p>
           <a:p>
             <a:r>
-              <a:rPr sz="910" b="0" i="0">
+              <a:rPr sz="801" b="0" i="0">
                 <a:solidFill>
                   <a:srgbClr val="EAF7F5"/>
                 </a:solidFill>
@@ -11981,7 +11981,7 @@
           </a:p>
           <a:p>
             <a:r>
-              <a:rPr sz="910" b="0" i="0">
+              <a:rPr sz="801" b="0" i="0">
                 <a:solidFill>
                   <a:srgbClr val="EAF7F5"/>
                 </a:solidFill>
@@ -11992,7 +11992,7 @@
           </a:p>
           <a:p>
             <a:r>
-              <a:rPr sz="910" b="0" i="0">
+              <a:rPr sz="801" b="0" i="0">
                 <a:solidFill>
                   <a:srgbClr val="EAF7F5"/>
                 </a:solidFill>
@@ -12003,7 +12003,7 @@
           </a:p>
           <a:p>
             <a:r>
-              <a:rPr sz="910" b="0" i="0">
+              <a:rPr sz="801" b="0" i="0">
                 <a:solidFill>
                   <a:srgbClr val="EAF7F5"/>
                 </a:solidFill>
@@ -12014,7 +12014,7 @@
           </a:p>
           <a:p>
             <a:r>
-              <a:rPr sz="910" b="0" i="0">
+              <a:rPr sz="801" b="0" i="0">
                 <a:solidFill>
                   <a:srgbClr val="EAF7F5"/>
                 </a:solidFill>
@@ -12025,7 +12025,7 @@
           </a:p>
           <a:p>
             <a:r>
-              <a:rPr sz="910" b="0" i="0">
+              <a:rPr sz="801" b="0" i="0">
                 <a:solidFill>
                   <a:srgbClr val="EAF7F5"/>
                 </a:solidFill>
@@ -12036,7 +12036,7 @@
           </a:p>
           <a:p>
             <a:r>
-              <a:rPr sz="910" b="0" i="0">
+              <a:rPr sz="801" b="0" i="0">
                 <a:solidFill>
                   <a:srgbClr val="EAF7F5"/>
                 </a:solidFill>
@@ -12047,7 +12047,7 @@
           </a:p>
           <a:p>
             <a:r>
-              <a:rPr sz="910" b="0" i="0">
+              <a:rPr sz="801" b="0" i="0">
                 <a:solidFill>
                   <a:srgbClr val="EAF7F5"/>
                 </a:solidFill>
@@ -18892,13 +18892,13 @@
           <a:noFill/>
         </p:spPr>
         <p:txBody>
-          <a:bodyPr wrap="square" lIns="0" rIns="0" tIns="0" bIns="0" anchor="t">
-            <a:spAutoFit/>
-          </a:bodyPr>
-          <a:lstStyle/>
-          <a:p>
-            <a:r>
-              <a:rPr sz="879" b="0" i="0">
+          <a:bodyPr wrap="none" lIns="0" rIns="0" tIns="0" bIns="0" anchor="t">
+            <a:spAutoFit/>
+          </a:bodyPr>
+          <a:lstStyle/>
+          <a:p>
+            <a:r>
+              <a:rPr sz="773" b="0" i="0">
                 <a:solidFill>
                   <a:srgbClr val="EAF7F5"/>
                 </a:solidFill>
@@ -18909,7 +18909,7 @@
           </a:p>
           <a:p>
             <a:r>
-              <a:rPr sz="879" b="0" i="0">
+              <a:rPr sz="773" b="0" i="0">
                 <a:solidFill>
                   <a:srgbClr val="EAF7F5"/>
                 </a:solidFill>
@@ -18920,7 +18920,7 @@
           </a:p>
           <a:p>
             <a:r>
-              <a:rPr sz="879" b="0" i="0">
+              <a:rPr sz="773" b="0" i="0">
                 <a:solidFill>
                   <a:srgbClr val="EAF7F5"/>
                 </a:solidFill>
@@ -18931,7 +18931,7 @@
           </a:p>
           <a:p>
             <a:r>
-              <a:rPr sz="879" b="0" i="0">
+              <a:rPr sz="773" b="0" i="0">
                 <a:solidFill>
                   <a:srgbClr val="EAF7F5"/>
                 </a:solidFill>
@@ -18942,7 +18942,7 @@
           </a:p>
           <a:p>
             <a:r>
-              <a:rPr sz="879" b="0" i="0">
+              <a:rPr sz="773" b="0" i="0">
                 <a:solidFill>
                   <a:srgbClr val="EAF7F5"/>
                 </a:solidFill>
@@ -18953,7 +18953,7 @@
           </a:p>
           <a:p>
             <a:r>
-              <a:rPr sz="879" b="0" i="0">
+              <a:rPr sz="773" b="0" i="0">
                 <a:solidFill>
                   <a:srgbClr val="EAF7F5"/>
                 </a:solidFill>
@@ -18964,7 +18964,7 @@
           </a:p>
           <a:p>
             <a:r>
-              <a:rPr sz="879" b="0" i="0">
+              <a:rPr sz="773" b="0" i="0">
                 <a:solidFill>
                   <a:srgbClr val="EAF7F5"/>
                 </a:solidFill>
@@ -18975,7 +18975,7 @@
           </a:p>
           <a:p>
             <a:r>
-              <a:rPr sz="879" b="0" i="0">
+              <a:rPr sz="773" b="0" i="0">
                 <a:solidFill>
                   <a:srgbClr val="EAF7F5"/>
                 </a:solidFill>
@@ -18986,7 +18986,7 @@
           </a:p>
           <a:p>
             <a:r>
-              <a:rPr sz="879" b="0" i="0">
+              <a:rPr sz="773" b="0" i="0">
                 <a:solidFill>
                   <a:srgbClr val="EAF7F5"/>
                 </a:solidFill>
@@ -18997,7 +18997,7 @@
           </a:p>
           <a:p>
             <a:r>
-              <a:rPr sz="879" b="0" i="0">
+              <a:rPr sz="773" b="0" i="0">
                 <a:solidFill>
                   <a:srgbClr val="EAF7F5"/>
                 </a:solidFill>
@@ -19008,7 +19008,7 @@
           </a:p>
           <a:p>
             <a:r>
-              <a:rPr sz="879" b="0" i="0">
+              <a:rPr sz="773" b="0" i="0">
                 <a:solidFill>
                   <a:srgbClr val="EAF7F5"/>
                 </a:solidFill>
@@ -19019,7 +19019,7 @@
           </a:p>
           <a:p>
             <a:r>
-              <a:rPr sz="879" b="0" i="0">
+              <a:rPr sz="773" b="0" i="0">
                 <a:solidFill>
                   <a:srgbClr val="EAF7F5"/>
                 </a:solidFill>
@@ -19030,7 +19030,7 @@
           </a:p>
           <a:p>
             <a:r>
-              <a:rPr sz="879" b="0" i="0">
+              <a:rPr sz="773" b="0" i="0">
                 <a:solidFill>
                   <a:srgbClr val="EAF7F5"/>
                 </a:solidFill>
@@ -19041,7 +19041,7 @@
           </a:p>
           <a:p>
             <a:r>
-              <a:rPr sz="879" b="0" i="0">
+              <a:rPr sz="773" b="0" i="0">
                 <a:solidFill>
                   <a:srgbClr val="EAF7F5"/>
                 </a:solidFill>
@@ -19052,7 +19052,7 @@
           </a:p>
           <a:p>
             <a:r>
-              <a:rPr sz="879" b="0" i="0">
+              <a:rPr sz="773" b="0" i="0">
                 <a:solidFill>
                   <a:srgbClr val="EAF7F5"/>
                 </a:solidFill>
@@ -19063,7 +19063,7 @@
           </a:p>
           <a:p>
             <a:r>
-              <a:rPr sz="879" b="0" i="0">
+              <a:rPr sz="773" b="0" i="0">
                 <a:solidFill>
                   <a:srgbClr val="EAF7F5"/>
                 </a:solidFill>
@@ -20418,13 +20418,13 @@
           <a:noFill/>
         </p:spPr>
         <p:txBody>
-          <a:bodyPr wrap="square" lIns="0" rIns="0" tIns="0" bIns="0" anchor="t">
-            <a:spAutoFit/>
-          </a:bodyPr>
-          <a:lstStyle/>
-          <a:p>
-            <a:r>
-              <a:rPr sz="1085" b="0" i="0">
+          <a:bodyPr wrap="none" lIns="0" rIns="0" tIns="0" bIns="0" anchor="t">
+            <a:spAutoFit/>
+          </a:bodyPr>
+          <a:lstStyle/>
+          <a:p>
+            <a:r>
+              <a:rPr sz="954" b="0" i="0">
                 <a:solidFill>
                   <a:srgbClr val="EAF7F5"/>
                 </a:solidFill>
@@ -20435,7 +20435,7 @@
           </a:p>
           <a:p>
             <a:r>
-              <a:rPr sz="1085" b="0" i="0">
+              <a:rPr sz="954" b="0" i="0">
                 <a:solidFill>
                   <a:srgbClr val="EAF7F5"/>
                 </a:solidFill>
@@ -20446,7 +20446,7 @@
           </a:p>
           <a:p>
             <a:r>
-              <a:rPr sz="1085" b="0" i="0">
+              <a:rPr sz="954" b="0" i="0">
                 <a:solidFill>
                   <a:srgbClr val="EAF7F5"/>
                 </a:solidFill>
@@ -20457,7 +20457,7 @@
           </a:p>
           <a:p>
             <a:r>
-              <a:rPr sz="1085" b="0" i="0">
+              <a:rPr sz="954" b="0" i="0">
                 <a:solidFill>
                   <a:srgbClr val="EAF7F5"/>
                 </a:solidFill>
@@ -20468,7 +20468,7 @@
           </a:p>
           <a:p>
             <a:r>
-              <a:rPr sz="1085" b="0" i="0">
+              <a:rPr sz="954" b="0" i="0">
                 <a:solidFill>
                   <a:srgbClr val="EAF7F5"/>
                 </a:solidFill>
@@ -20479,7 +20479,7 @@
           </a:p>
           <a:p>
             <a:r>
-              <a:rPr sz="1085" b="0" i="0">
+              <a:rPr sz="954" b="0" i="0">
                 <a:solidFill>
                   <a:srgbClr val="EAF7F5"/>
                 </a:solidFill>
@@ -20490,7 +20490,7 @@
           </a:p>
           <a:p>
             <a:r>
-              <a:rPr sz="1085" b="0" i="0">
+              <a:rPr sz="954" b="0" i="0">
                 <a:solidFill>
                   <a:srgbClr val="EAF7F5"/>
                 </a:solidFill>
@@ -20501,7 +20501,7 @@
           </a:p>
           <a:p>
             <a:r>
-              <a:rPr sz="1085" b="0" i="0">
+              <a:rPr sz="954" b="0" i="0">
                 <a:solidFill>
                   <a:srgbClr val="EAF7F5"/>
                 </a:solidFill>
@@ -20512,7 +20512,7 @@
           </a:p>
           <a:p>
             <a:r>
-              <a:rPr sz="1085" b="0" i="0">
+              <a:rPr sz="954" b="0" i="0">
                 <a:solidFill>
                   <a:srgbClr val="EAF7F5"/>
                 </a:solidFill>
@@ -20523,7 +20523,7 @@
           </a:p>
           <a:p>
             <a:r>
-              <a:rPr sz="1085" b="0" i="0">
+              <a:rPr sz="954" b="0" i="0">
                 <a:solidFill>
                   <a:srgbClr val="EAF7F5"/>
                 </a:solidFill>
@@ -20534,7 +20534,7 @@
           </a:p>
           <a:p>
             <a:r>
-              <a:rPr sz="1085" b="0" i="0">
+              <a:rPr sz="954" b="0" i="0">
                 <a:solidFill>
                   <a:srgbClr val="EAF7F5"/>
                 </a:solidFill>
@@ -20545,7 +20545,7 @@
           </a:p>
           <a:p>
             <a:r>
-              <a:rPr sz="1085" b="0" i="0">
+              <a:rPr sz="954" b="0" i="0">
                 <a:solidFill>
                   <a:srgbClr val="EAF7F5"/>
                 </a:solidFill>
@@ -20556,7 +20556,7 @@
           </a:p>
           <a:p>
             <a:r>
-              <a:rPr sz="1085" b="0" i="0">
+              <a:rPr sz="954" b="0" i="0">
                 <a:solidFill>
                   <a:srgbClr val="EAF7F5"/>
                 </a:solidFill>
@@ -20567,7 +20567,7 @@
           </a:p>
           <a:p>
             <a:r>
-              <a:rPr sz="1085" b="0" i="0">
+              <a:rPr sz="954" b="0" i="0">
                 <a:solidFill>
                   <a:srgbClr val="EAF7F5"/>
                 </a:solidFill>
